--- a/lending_club_pd_slides.pptx
+++ b/lending_club_pd_slides.pptx
@@ -2124,6 +2124,19 @@
             <a:pPr marL="0" indent="0">
               <a:buNone/>
             </a:pPr>
+            <a:endParaRPr lang="en-US" sz="1000" dirty="0">
+              <a:solidFill>
+                <a:srgbClr val="1E293B"/>
+              </a:solidFill>
+              <a:latin typeface="Calibri" pitchFamily="34" charset="0"/>
+              <a:ea typeface="Calibri" pitchFamily="34" charset="-122"/>
+              <a:cs typeface="Calibri" pitchFamily="34" charset="-120"/>
+            </a:endParaRPr>
+          </a:p>
+          <a:p>
+            <a:pPr marL="0" indent="0">
+              <a:buNone/>
+            </a:pPr>
             <a:r>
               <a:rPr lang="en-US" sz="1000" dirty="0">
                 <a:solidFill>
@@ -2133,7 +2146,7 @@
                 <a:ea typeface="Calibri" pitchFamily="34" charset="-122"/>
                 <a:cs typeface="Calibri" pitchFamily="34" charset="-120"/>
               </a:rPr>
-              <a:t>Excluded: Current, Late, In Grace Period</a:t>
+              <a:t>Excluded: Current, Late, In Grace Period, etc.</a:t>
             </a:r>
             <a:endParaRPr lang="en-US" sz="1000" dirty="0"/>
           </a:p>
@@ -2359,6 +2372,19 @@
             <a:pPr marL="0" indent="0">
               <a:buNone/>
             </a:pPr>
+            <a:endParaRPr lang="en-US" sz="1000" dirty="0">
+              <a:solidFill>
+                <a:srgbClr val="1E293B"/>
+              </a:solidFill>
+              <a:latin typeface="Calibri" pitchFamily="34" charset="0"/>
+              <a:ea typeface="Calibri" pitchFamily="34" charset="-122"/>
+              <a:cs typeface="Calibri" pitchFamily="34" charset="-120"/>
+            </a:endParaRPr>
+          </a:p>
+          <a:p>
+            <a:pPr marL="0" indent="0">
+              <a:buNone/>
+            </a:pPr>
             <a:r>
               <a:rPr lang="en-US" sz="1000" dirty="0">
                 <a:solidFill>
@@ -2675,6 +2701,33 @@
                 <a:cs typeface="Calibri" pitchFamily="34" charset="-120"/>
               </a:rPr>
               <a:t>OHE for categorical variables</a:t>
+            </a:r>
+          </a:p>
+          <a:p>
+            <a:pPr marL="0" indent="0">
+              <a:buNone/>
+            </a:pPr>
+            <a:endParaRPr lang="en-US" sz="1000" dirty="0">
+              <a:solidFill>
+                <a:srgbClr val="1E293B"/>
+              </a:solidFill>
+              <a:latin typeface="Calibri" pitchFamily="34" charset="0"/>
+              <a:cs typeface="Calibri" pitchFamily="34" charset="-120"/>
+            </a:endParaRPr>
+          </a:p>
+          <a:p>
+            <a:pPr marL="0" indent="0">
+              <a:buNone/>
+            </a:pPr>
+            <a:r>
+              <a:rPr lang="en-US" sz="1000" dirty="0">
+                <a:solidFill>
+                  <a:srgbClr val="1E293B"/>
+                </a:solidFill>
+                <a:latin typeface="Calibri" pitchFamily="34" charset="0"/>
+                <a:cs typeface="Calibri" pitchFamily="34" charset="-120"/>
+              </a:rPr>
+              <a:t>Multicollinearity check</a:t>
             </a:r>
           </a:p>
           <a:p>
@@ -2738,7 +2791,7 @@
                 <a:latin typeface="Calibri" pitchFamily="34" charset="0"/>
                 <a:cs typeface="Calibri" pitchFamily="34" charset="-120"/>
               </a:rPr>
-              <a:t>23 final features</a:t>
+              <a:t>9 final features</a:t>
             </a:r>
             <a:endParaRPr lang="en-US" sz="1000" b="1" dirty="0"/>
           </a:p>
@@ -3390,7 +3443,7 @@
                 <a:ea typeface="Calibri" pitchFamily="34" charset="-122"/>
                 <a:cs typeface="Calibri" pitchFamily="34" charset="-120"/>
               </a:rPr>
-              <a:t>Methodology – Feature Selection based on Information Value</a:t>
+              <a:t>Methodology – Feature Selection based on VIF and IV</a:t>
             </a:r>
             <a:endParaRPr lang="en-US" sz="2200" dirty="0"/>
           </a:p>
@@ -3434,36 +3487,6 @@
           </a:p>
         </p:txBody>
       </p:sp>
-      <p:pic>
-        <p:nvPicPr>
-          <p:cNvPr id="6" name="Picture 5" descr="A graph with colorful bars and numbers&#10;&#10;AI-generated content may be incorrect.">
-            <a:extLst>
-              <a:ext uri="{FF2B5EF4-FFF2-40B4-BE49-F238E27FC236}">
-                <a16:creationId xmlns:a16="http://schemas.microsoft.com/office/drawing/2014/main" id="{FC486EDB-FC95-094C-8AA8-584B2BEB9733}"/>
-              </a:ext>
-            </a:extLst>
-          </p:cNvPr>
-          <p:cNvPicPr>
-            <a:picLocks noChangeAspect="1"/>
-          </p:cNvPicPr>
-          <p:nvPr/>
-        </p:nvPicPr>
-        <p:blipFill>
-          <a:blip r:embed="rId3"/>
-          <a:stretch>
-            <a:fillRect/>
-          </a:stretch>
-        </p:blipFill>
-        <p:spPr>
-          <a:xfrm>
-            <a:off x="457200" y="1555476"/>
-            <a:ext cx="5796366" cy="3346176"/>
-          </a:xfrm>
-          <a:prstGeom prst="rect">
-            <a:avLst/>
-          </a:prstGeom>
-        </p:spPr>
-      </p:pic>
       <p:sp>
         <p:nvSpPr>
           <p:cNvPr id="8" name="TextBox 7">
@@ -3479,7 +3502,7 @@
         <p:spPr>
           <a:xfrm>
             <a:off x="457200" y="755878"/>
-            <a:ext cx="8229600" cy="738664"/>
+            <a:ext cx="8229600" cy="1169551"/>
           </a:xfrm>
           <a:prstGeom prst="rect">
             <a:avLst/>
@@ -3495,8 +3518,12 @@
           <a:lstStyle/>
           <a:p>
             <a:r>
+              <a:rPr lang="en-US" sz="1400" b="1" dirty="0"/>
+              <a:t>Information Value (IV) </a:t>
+            </a:r>
+            <a:r>
               <a:rPr lang="en-US" sz="1400" dirty="0"/>
-              <a:t>Information Value (IV) measures how strongly a variable predicts whether a customer will default (bad) or pay back (good)</a:t>
+              <a:t>measures how strongly a variable predicts whether a customer will default (bad) or pay back (good)</a:t>
             </a:r>
             <a:r>
               <a:rPr lang="en-US" sz="1400" dirty="0">
@@ -3505,12 +3532,97 @@
                 </a:solidFill>
                 <a:latin typeface="Google Sans"/>
               </a:rPr>
-              <a:t>, acting as a scorecard for feature selection in logistic regression. It sums up how well each category separates "goods" from "bads," with higher IV indicating a stronger, more useful predictor for risk</a:t>
+              <a:t>, with higher IV indicating a stronger, more useful predictor for risk.</a:t>
             </a:r>
-            <a:endParaRPr lang="en-US" sz="1400" dirty="0"/>
-          </a:p>
-        </p:txBody>
-      </p:sp>
+          </a:p>
+          <a:p>
+            <a:endParaRPr lang="en-US" sz="1400" dirty="0">
+              <a:solidFill>
+                <a:srgbClr val="0A0A0A"/>
+              </a:solidFill>
+              <a:latin typeface="Google Sans"/>
+            </a:endParaRPr>
+          </a:p>
+          <a:p>
+            <a:r>
+              <a:rPr lang="en-US" sz="1400" b="1" dirty="0"/>
+              <a:t>Variance Inflation Factor (VIF) </a:t>
+            </a:r>
+            <a:r>
+              <a:rPr lang="en-US" sz="1400" dirty="0"/>
+              <a:t>detects </a:t>
+            </a:r>
+            <a:r>
+              <a:rPr lang="en-US" sz="1400" b="1" dirty="0"/>
+              <a:t>multicollinearity</a:t>
+            </a:r>
+            <a:r>
+              <a:rPr lang="en-US" sz="1400" dirty="0"/>
+              <a:t> in features. Removing highly correlated features (VIF &gt;= 10) help to reduce model complexity and improve stability and interpretability.</a:t>
+            </a:r>
+          </a:p>
+        </p:txBody>
+      </p:sp>
+      <p:pic>
+        <p:nvPicPr>
+          <p:cNvPr id="7" name="Picture 6" descr="A screen shot of a computer&#10;&#10;AI-generated content may be incorrect.">
+            <a:extLst>
+              <a:ext uri="{FF2B5EF4-FFF2-40B4-BE49-F238E27FC236}">
+                <a16:creationId xmlns:a16="http://schemas.microsoft.com/office/drawing/2014/main" id="{98506E89-F1B2-3E7C-1692-B8551C4C2C5B}"/>
+              </a:ext>
+            </a:extLst>
+          </p:cNvPr>
+          <p:cNvPicPr>
+            <a:picLocks noChangeAspect="1"/>
+          </p:cNvPicPr>
+          <p:nvPr/>
+        </p:nvPicPr>
+        <p:blipFill>
+          <a:blip r:embed="rId3"/>
+          <a:stretch>
+            <a:fillRect/>
+          </a:stretch>
+        </p:blipFill>
+        <p:spPr>
+          <a:xfrm>
+            <a:off x="457200" y="2022939"/>
+            <a:ext cx="3794219" cy="2743200"/>
+          </a:xfrm>
+          <a:prstGeom prst="rect">
+            <a:avLst/>
+          </a:prstGeom>
+        </p:spPr>
+      </p:pic>
+      <p:pic>
+        <p:nvPicPr>
+          <p:cNvPr id="10" name="Picture 9" descr="A screen shot of a graph&#10;&#10;AI-generated content may be incorrect.">
+            <a:extLst>
+              <a:ext uri="{FF2B5EF4-FFF2-40B4-BE49-F238E27FC236}">
+                <a16:creationId xmlns:a16="http://schemas.microsoft.com/office/drawing/2014/main" id="{00A8A796-DFF3-F0DC-6968-502E48461F03}"/>
+              </a:ext>
+            </a:extLst>
+          </p:cNvPr>
+          <p:cNvPicPr>
+            <a:picLocks noChangeAspect="1"/>
+          </p:cNvPicPr>
+          <p:nvPr/>
+        </p:nvPicPr>
+        <p:blipFill>
+          <a:blip r:embed="rId4"/>
+          <a:stretch>
+            <a:fillRect/>
+          </a:stretch>
+        </p:blipFill>
+        <p:spPr>
+          <a:xfrm>
+            <a:off x="4367365" y="2046032"/>
+            <a:ext cx="4319434" cy="2743200"/>
+          </a:xfrm>
+          <a:prstGeom prst="rect">
+            <a:avLst/>
+          </a:prstGeom>
+        </p:spPr>
+      </p:pic>
     </p:spTree>
     <p:extLst>
       <p:ext uri="{BB962C8B-B14F-4D97-AF65-F5344CB8AC3E}">
@@ -4575,8 +4687,8 @@
           </a:prstGeom>
         </p:spPr>
       </p:pic>
-      <mc:AlternateContent xmlns:mc="http://schemas.openxmlformats.org/markup-compatibility/2006">
-        <mc:Choice xmlns:a14="http://schemas.microsoft.com/office/drawing/2010/main" Requires="a14">
+      <mc:AlternateContent xmlns:mc="http://schemas.openxmlformats.org/markup-compatibility/2006" xmlns:a14="http://schemas.microsoft.com/office/drawing/2010/main">
+        <mc:Choice Requires="a14">
           <p:sp>
             <p:nvSpPr>
               <p:cNvPr id="12" name="TextBox 11">
@@ -4620,6 +4732,7 @@
                 </a:endParaRPr>
               </a:p>
               <a:p>
+                <a:pPr/>
                 <a14:m>
                   <m:oMathPara xmlns:m="http://schemas.openxmlformats.org/officeDocument/2006/math">
                     <m:oMathParaPr>
@@ -4631,13 +4744,13 @@
                           <m:sty m:val="p"/>
                         </m:rPr>
                         <a:rPr lang="en-US" sz="1400" b="0" i="0" smtClean="0">
-                          <a:latin typeface="+mj-lt"/>
+                          <a:latin typeface="Cambria Math" panose="02040503050406030204" pitchFamily="18" charset="0"/>
                         </a:rPr>
                         <m:t>ln</m:t>
                       </m:r>
                       <m:r>
                         <a:rPr lang="en-US" sz="1400" b="0" i="0" smtClean="0">
-                          <a:latin typeface="+mj-lt"/>
+                          <a:latin typeface="Cambria Math" panose="02040503050406030204" pitchFamily="18" charset="0"/>
                         </a:rPr>
                         <m:t>(</m:t>
                       </m:r>
@@ -4645,14 +4758,14 @@
                         <m:fPr>
                           <m:ctrlPr>
                             <a:rPr lang="en-US" sz="1400" i="1" smtClean="0">
-                              <a:latin typeface="+mj-lt"/>
+                              <a:latin typeface="Cambria Math" panose="02040503050406030204" pitchFamily="18" charset="0"/>
                             </a:rPr>
                           </m:ctrlPr>
                         </m:fPr>
                         <m:num>
                           <m:r>
                             <a:rPr lang="en-US" sz="1400" b="0" i="1" smtClean="0">
-                              <a:latin typeface="+mj-lt"/>
+                              <a:latin typeface="Cambria Math" panose="02040503050406030204" pitchFamily="18" charset="0"/>
                             </a:rPr>
                             <m:t>𝐷𝑒𝑓𝑎𝑢𝑙𝑡</m:t>
                           </m:r>
@@ -4660,19 +4773,19 @@
                         <m:den>
                           <m:r>
                             <a:rPr lang="en-US" sz="1400" b="0" i="1" smtClean="0">
-                              <a:latin typeface="+mj-lt"/>
+                              <a:latin typeface="Cambria Math" panose="02040503050406030204" pitchFamily="18" charset="0"/>
                             </a:rPr>
                             <m:t>𝑁𝑜𝑛</m:t>
                           </m:r>
                           <m:r>
                             <a:rPr lang="en-US" sz="1400" b="0" i="1" smtClean="0">
-                              <a:latin typeface="+mj-lt"/>
+                              <a:latin typeface="Cambria Math" panose="02040503050406030204" pitchFamily="18" charset="0"/>
                             </a:rPr>
                             <m:t>−</m:t>
                           </m:r>
                           <m:r>
                             <a:rPr lang="en-US" sz="1400" b="0" i="1" smtClean="0">
-                              <a:latin typeface="+mj-lt"/>
+                              <a:latin typeface="Cambria Math" panose="02040503050406030204" pitchFamily="18" charset="0"/>
                             </a:rPr>
                             <m:t>𝑑𝑒𝑓𝑎𝑢𝑙𝑡</m:t>
                           </m:r>
@@ -4680,13 +4793,13 @@
                       </m:f>
                       <m:r>
                         <a:rPr lang="en-US" sz="1400" b="0" i="1" smtClean="0">
-                          <a:latin typeface="+mj-lt"/>
+                          <a:latin typeface="Cambria Math" panose="02040503050406030204" pitchFamily="18" charset="0"/>
                         </a:rPr>
                         <m:t>)</m:t>
                       </m:r>
                       <m:r>
                         <a:rPr lang="en-US" sz="1400" b="0" i="1" smtClean="0">
-                          <a:latin typeface="+mj-lt"/>
+                          <a:latin typeface="Cambria Math" panose="02040503050406030204" pitchFamily="18" charset="0"/>
                           <a:ea typeface="Cambria Math" panose="02040503050406030204" pitchFamily="18" charset="0"/>
                         </a:rPr>
                         <m:t>=</m:t>
@@ -4696,7 +4809,7 @@
                           <m:chr m:val="∑"/>
                           <m:ctrlPr>
                             <a:rPr lang="en-US" sz="1400" b="0" i="1" smtClean="0">
-                              <a:latin typeface="+mj-lt"/>
+                              <a:latin typeface="Cambria Math" panose="02040503050406030204" pitchFamily="18" charset="0"/>
                               <a:ea typeface="Cambria Math" panose="02040503050406030204" pitchFamily="18" charset="0"/>
                             </a:rPr>
                           </m:ctrlPr>
@@ -4707,14 +4820,14 @@
                               <m:brk m:alnAt="23"/>
                             </m:rPr>
                             <a:rPr lang="en-US" sz="1400" b="0" i="1" smtClean="0">
-                              <a:latin typeface="+mj-lt"/>
+                              <a:latin typeface="Cambria Math" panose="02040503050406030204" pitchFamily="18" charset="0"/>
                               <a:ea typeface="Cambria Math" panose="02040503050406030204" pitchFamily="18" charset="0"/>
                             </a:rPr>
                             <m:t>𝑗</m:t>
                           </m:r>
                           <m:r>
                             <a:rPr lang="en-US" sz="1400" b="0" i="1" smtClean="0">
-                              <a:latin typeface="+mj-lt"/>
+                              <a:latin typeface="Cambria Math" panose="02040503050406030204" pitchFamily="18" charset="0"/>
                               <a:ea typeface="Cambria Math" panose="02040503050406030204" pitchFamily="18" charset="0"/>
                             </a:rPr>
                             <m:t>=1</m:t>
@@ -4723,7 +4836,7 @@
                         <m:sup>
                           <m:r>
                             <a:rPr lang="en-US" sz="1400" b="0" i="1" smtClean="0">
-                              <a:latin typeface="+mj-lt"/>
+                              <a:latin typeface="Cambria Math" panose="02040503050406030204" pitchFamily="18" charset="0"/>
                               <a:ea typeface="Cambria Math" panose="02040503050406030204" pitchFamily="18" charset="0"/>
                             </a:rPr>
                             <m:t>𝑚</m:t>
@@ -4734,7 +4847,7 @@
                             <m:sSubPr>
                               <m:ctrlPr>
                                 <a:rPr lang="en-US" sz="1400" b="0" i="1" smtClean="0">
-                                  <a:latin typeface="+mj-lt"/>
+                                  <a:latin typeface="Cambria Math" panose="02040503050406030204" pitchFamily="18" charset="0"/>
                                   <a:ea typeface="Cambria Math" panose="02040503050406030204" pitchFamily="18" charset="0"/>
                                 </a:rPr>
                               </m:ctrlPr>
@@ -4742,7 +4855,7 @@
                             <m:e>
                               <m:r>
                                 <a:rPr lang="en-US" sz="1400" b="0" i="1" smtClean="0">
-                                  <a:latin typeface="+mj-lt"/>
+                                  <a:latin typeface="Cambria Math" panose="02040503050406030204" pitchFamily="18" charset="0"/>
                                   <a:ea typeface="Cambria Math" panose="02040503050406030204" pitchFamily="18" charset="0"/>
                                 </a:rPr>
                                 <m:t>𝛽</m:t>
@@ -4751,7 +4864,7 @@
                             <m:sub>
                               <m:r>
                                 <a:rPr lang="en-US" sz="1400" b="0" i="1" smtClean="0">
-                                  <a:latin typeface="+mj-lt"/>
+                                  <a:latin typeface="Cambria Math" panose="02040503050406030204" pitchFamily="18" charset="0"/>
                                   <a:ea typeface="Cambria Math" panose="02040503050406030204" pitchFamily="18" charset="0"/>
                                 </a:rPr>
                                 <m:t>𝑗</m:t>
@@ -4762,7 +4875,7 @@
                             <m:sSubPr>
                               <m:ctrlPr>
                                 <a:rPr lang="en-US" sz="1400" b="0" i="1" smtClean="0">
-                                  <a:latin typeface="+mj-lt"/>
+                                  <a:latin typeface="Cambria Math" panose="02040503050406030204" pitchFamily="18" charset="0"/>
                                   <a:ea typeface="Cambria Math" panose="02040503050406030204" pitchFamily="18" charset="0"/>
                                 </a:rPr>
                               </m:ctrlPr>
@@ -4770,7 +4883,7 @@
                             <m:e>
                               <m:r>
                                 <a:rPr lang="en-US" sz="1400" b="0" i="1" smtClean="0">
-                                  <a:latin typeface="+mj-lt"/>
+                                  <a:latin typeface="Cambria Math" panose="02040503050406030204" pitchFamily="18" charset="0"/>
                                   <a:ea typeface="Cambria Math" panose="02040503050406030204" pitchFamily="18" charset="0"/>
                                 </a:rPr>
                                 <m:t>𝑋</m:t>
@@ -4779,7 +4892,7 @@
                             <m:sub>
                               <m:r>
                                 <a:rPr lang="en-US" sz="1400" b="0" i="1" smtClean="0">
-                                  <a:latin typeface="+mj-lt"/>
+                                  <a:latin typeface="Cambria Math" panose="02040503050406030204" pitchFamily="18" charset="0"/>
                                   <a:ea typeface="Cambria Math" panose="02040503050406030204" pitchFamily="18" charset="0"/>
                                 </a:rPr>
                                 <m:t>𝑗</m:t>
@@ -4798,7 +4911,7 @@
             </p:txBody>
           </p:sp>
         </mc:Choice>
-        <mc:Fallback>
+        <mc:Fallback xmlns="">
           <p:sp>
             <p:nvSpPr>
               <p:cNvPr id="12" name="TextBox 11">
@@ -5003,36 +5116,6 @@
           </a:p>
         </p:txBody>
       </p:sp>
-      <p:pic>
-        <p:nvPicPr>
-          <p:cNvPr id="9" name="Picture 8" descr="A close-up of a graph&#10;&#10;AI-generated content may be incorrect.">
-            <a:extLst>
-              <a:ext uri="{FF2B5EF4-FFF2-40B4-BE49-F238E27FC236}">
-                <a16:creationId xmlns:a16="http://schemas.microsoft.com/office/drawing/2014/main" id="{5828EAF1-E154-1A05-A405-FB0B08E52CF9}"/>
-              </a:ext>
-            </a:extLst>
-          </p:cNvPr>
-          <p:cNvPicPr>
-            <a:picLocks noChangeAspect="1"/>
-          </p:cNvPicPr>
-          <p:nvPr/>
-        </p:nvPicPr>
-        <p:blipFill>
-          <a:blip r:embed="rId3"/>
-          <a:stretch>
-            <a:fillRect/>
-          </a:stretch>
-        </p:blipFill>
-        <p:spPr>
-          <a:xfrm>
-            <a:off x="457200" y="1849881"/>
-            <a:ext cx="8138160" cy="2906484"/>
-          </a:xfrm>
-          <a:prstGeom prst="rect">
-            <a:avLst/>
-          </a:prstGeom>
-        </p:spPr>
-      </p:pic>
       <p:sp>
         <p:nvSpPr>
           <p:cNvPr id="10" name="TextBox 9">
@@ -5047,8 +5130,8 @@
         </p:nvSpPr>
         <p:spPr>
           <a:xfrm>
-            <a:off x="457200" y="837676"/>
-            <a:ext cx="8138160" cy="738664"/>
+            <a:off x="5839326" y="837676"/>
+            <a:ext cx="2756034" cy="1815882"/>
           </a:xfrm>
           <a:prstGeom prst="rect">
             <a:avLst/>
@@ -5081,6 +5164,12 @@
               </a:rPr>
               <a:t>Positive coefficient: higher value indicates higher probability of default</a:t>
             </a:r>
+          </a:p>
+          <a:p>
+            <a:pPr marL="285750" indent="-285750">
+              <a:buFont typeface="Arial" panose="020B0604020202020204" pitchFamily="34" charset="0"/>
+              <a:buChar char="•"/>
+            </a:pPr>
             <a:endParaRPr lang="en-US" sz="1400" dirty="0">
               <a:latin typeface="+mj-lt"/>
             </a:endParaRPr>
@@ -5108,6 +5197,36 @@
           </a:p>
         </p:txBody>
       </p:sp>
+      <p:pic>
+        <p:nvPicPr>
+          <p:cNvPr id="6" name="Picture 5" descr="A graph with red and blue bars&#10;&#10;AI-generated content may be incorrect.">
+            <a:extLst>
+              <a:ext uri="{FF2B5EF4-FFF2-40B4-BE49-F238E27FC236}">
+                <a16:creationId xmlns:a16="http://schemas.microsoft.com/office/drawing/2014/main" id="{2515A412-976D-521B-7740-04B751C7EBEE}"/>
+              </a:ext>
+            </a:extLst>
+          </p:cNvPr>
+          <p:cNvPicPr>
+            <a:picLocks noChangeAspect="1"/>
+          </p:cNvPicPr>
+          <p:nvPr/>
+        </p:nvPicPr>
+        <p:blipFill>
+          <a:blip r:embed="rId3"/>
+          <a:stretch>
+            <a:fillRect/>
+          </a:stretch>
+        </p:blipFill>
+        <p:spPr>
+          <a:xfrm>
+            <a:off x="457200" y="837676"/>
+            <a:ext cx="5212080" cy="4150632"/>
+          </a:xfrm>
+          <a:prstGeom prst="rect">
+            <a:avLst/>
+          </a:prstGeom>
+        </p:spPr>
+      </p:pic>
     </p:spTree>
     <p:extLst>
       <p:ext uri="{BB962C8B-B14F-4D97-AF65-F5344CB8AC3E}">
@@ -5573,7 +5692,7 @@
                 <a:ea typeface="Calibri" pitchFamily="34" charset="-122"/>
                 <a:cs typeface="Calibri" pitchFamily="34" charset="-120"/>
               </a:rPr>
-              <a:t>Debt-to-Income (DTI) &amp; Installments</a:t>
+              <a:t>Installments</a:t>
             </a:r>
             <a:endParaRPr lang="en-US" sz="1300" dirty="0"/>
           </a:p>
@@ -6227,10 +6346,9 @@
                   <a:srgbClr val="0D1B2A"/>
                 </a:solidFill>
                 <a:latin typeface="Calibri" pitchFamily="34" charset="0"/>
-                <a:ea typeface="Calibri" pitchFamily="34" charset="-122"/>
                 <a:cs typeface="Calibri" pitchFamily="34" charset="-120"/>
               </a:rPr>
-              <a:t>Grade</a:t>
+              <a:t>DTI</a:t>
             </a:r>
             <a:endParaRPr lang="en-US" sz="1300" dirty="0"/>
           </a:p>
@@ -6340,7 +6458,7 @@
                 <a:ea typeface="Calibri" pitchFamily="34" charset="-122"/>
                 <a:cs typeface="Calibri" pitchFamily="34" charset="-120"/>
               </a:rPr>
-              <a:t>Lower Grade  → more default opportunities.</a:t>
+              <a:t>High DTI → more default opportunities.</a:t>
             </a:r>
             <a:endParaRPr lang="en-US" sz="1100" dirty="0"/>
           </a:p>
@@ -7136,7 +7254,7 @@
                 <a:ea typeface="Calibri" pitchFamily="34" charset="-122"/>
                 <a:cs typeface="Calibri" pitchFamily="34" charset="-120"/>
               </a:rPr>
-              <a:t>Grade D/E/F/G loans may be under-priced relative to actual default rates. Review spread adequacy for high-DTI + low-FICO segments.</a:t>
+              <a:t>Grade D/E/F/G (a correlated feature with FICO) loans may be under-priced relative to actual default rates. Review spread adequacy for high-DTI + low-FICO segments.</a:t>
             </a:r>
             <a:endParaRPr lang="en-US" sz="1100" dirty="0"/>
           </a:p>

--- a/lending_club_pd_slides.pptx
+++ b/lending_club_pd_slides.pptx
@@ -2791,7 +2791,7 @@
                 <a:latin typeface="Calibri" pitchFamily="34" charset="0"/>
                 <a:cs typeface="Calibri" pitchFamily="34" charset="-120"/>
               </a:rPr>
-              <a:t>9 final features</a:t>
+              <a:t>8 final features</a:t>
             </a:r>
             <a:endParaRPr lang="en-US" sz="1000" b="1" dirty="0"/>
           </a:p>
@@ -3565,10 +3565,10 @@
       </p:sp>
       <p:pic>
         <p:nvPicPr>
-          <p:cNvPr id="7" name="Picture 6" descr="A screen shot of a computer&#10;&#10;AI-generated content may be incorrect.">
+          <p:cNvPr id="6" name="Picture 5" descr="A screenshot of a computer&#10;&#10;AI-generated content may be incorrect.">
             <a:extLst>
               <a:ext uri="{FF2B5EF4-FFF2-40B4-BE49-F238E27FC236}">
-                <a16:creationId xmlns:a16="http://schemas.microsoft.com/office/drawing/2014/main" id="{98506E89-F1B2-3E7C-1692-B8551C4C2C5B}"/>
+                <a16:creationId xmlns:a16="http://schemas.microsoft.com/office/drawing/2014/main" id="{A3337B44-D3E1-BDC3-14DE-544E4337D923}"/>
               </a:ext>
             </a:extLst>
           </p:cNvPr>
@@ -3585,8 +3585,8 @@
         </p:blipFill>
         <p:spPr>
           <a:xfrm>
-            <a:off x="457200" y="2022939"/>
-            <a:ext cx="3794219" cy="2743200"/>
+            <a:off x="457201" y="2046032"/>
+            <a:ext cx="4015821" cy="2743200"/>
           </a:xfrm>
           <a:prstGeom prst="rect">
             <a:avLst/>
@@ -3595,10 +3595,10 @@
       </p:pic>
       <p:pic>
         <p:nvPicPr>
-          <p:cNvPr id="10" name="Picture 9" descr="A screen shot of a graph&#10;&#10;AI-generated content may be incorrect.">
+          <p:cNvPr id="12" name="Picture 11" descr="A screen shot of a chart&#10;&#10;AI-generated content may be incorrect.">
             <a:extLst>
               <a:ext uri="{FF2B5EF4-FFF2-40B4-BE49-F238E27FC236}">
-                <a16:creationId xmlns:a16="http://schemas.microsoft.com/office/drawing/2014/main" id="{00A8A796-DFF3-F0DC-6968-502E48461F03}"/>
+                <a16:creationId xmlns:a16="http://schemas.microsoft.com/office/drawing/2014/main" id="{283EF63F-51E7-388E-5CC8-7E7819B66D1D}"/>
               </a:ext>
             </a:extLst>
           </p:cNvPr>
@@ -3615,8 +3615,8 @@
         </p:blipFill>
         <p:spPr>
           <a:xfrm>
-            <a:off x="4367365" y="2046032"/>
-            <a:ext cx="4319434" cy="2743200"/>
+            <a:off x="4367364" y="2046032"/>
+            <a:ext cx="4319435" cy="2743200"/>
           </a:xfrm>
           <a:prstGeom prst="rect">
             <a:avLst/>
@@ -3773,7 +3773,7 @@
           <p:nvPr>
             <p:extLst>
               <p:ext uri="{D42A27DB-BD31-4B8C-83A1-F6EECF244321}">
-                <p14:modId xmlns:p14="http://schemas.microsoft.com/office/powerpoint/2010/main" val="563411619"/>
+                <p14:modId xmlns:p14="http://schemas.microsoft.com/office/powerpoint/2010/main" val="2236777512"/>
               </p:ext>
             </p:extLst>
           </p:nvPr>
@@ -4528,7 +4528,7 @@
                           <a:ea typeface="Calibri" pitchFamily="34" charset="-122"/>
                           <a:cs typeface="Calibri" pitchFamily="34" charset="-120"/>
                         </a:rPr>
-                        <a:t>0.41</a:t>
+                        <a:t>0.40</a:t>
                       </a:r>
                       <a:endParaRPr lang="en-US" sz="1200" dirty="0">
                         <a:latin typeface="Calibri" charset="0"/>
@@ -5199,10 +5199,10 @@
       </p:sp>
       <p:pic>
         <p:nvPicPr>
-          <p:cNvPr id="6" name="Picture 5" descr="A graph with red and blue bars&#10;&#10;AI-generated content may be incorrect.">
+          <p:cNvPr id="7" name="Picture 6" descr="A graph with red and blue bars&#10;&#10;AI-generated content may be incorrect.">
             <a:extLst>
               <a:ext uri="{FF2B5EF4-FFF2-40B4-BE49-F238E27FC236}">
-                <a16:creationId xmlns:a16="http://schemas.microsoft.com/office/drawing/2014/main" id="{2515A412-976D-521B-7740-04B751C7EBEE}"/>
+                <a16:creationId xmlns:a16="http://schemas.microsoft.com/office/drawing/2014/main" id="{8DD602A4-E31A-436D-F8F2-DCB93BB9A62B}"/>
               </a:ext>
             </a:extLst>
           </p:cNvPr>
@@ -5220,7 +5220,7 @@
         <p:spPr>
           <a:xfrm>
             <a:off x="457200" y="837676"/>
-            <a:ext cx="5212080" cy="4150632"/>
+            <a:ext cx="5029200" cy="4004996"/>
           </a:xfrm>
           <a:prstGeom prst="rect">
             <a:avLst/>
